--- a/entregas/posts/site/kit/editavel/efeito-rebote-seg-12-10.pptx
+++ b/entregas/posts/site/kit/editavel/efeito-rebote-seg-12-10.pptx
@@ -4143,7 +4143,7 @@
         </p:nvSpPr>
         <p:spPr>
           <a:xfrm>
-            <a:off x="915442" y="3570032"/>
+            <a:off x="915442" y="3509133"/>
             <a:ext cx="4717078" cy="304495"/>
           </a:xfrm>
           <a:prstGeom prst="rect">
@@ -4169,13 +4169,13 @@
               </a:spcAft>
             </a:pPr>
             <a:r>
-              <a:rPr b="0" i="0" sz="2397" lang="pt-BR">
+              <a:rPr b="1" i="0" sz="2397" lang="pt-BR">
                 <a:solidFill>
                   <a:srgbClr val="E9C46A"/>
                 </a:solidFill>
-                <a:latin typeface="Barlow SemiBold"/>
-                <a:ea typeface="Barlow SemiBold"/>
-                <a:cs typeface="Barlow SemiBold"/>
+                <a:latin typeface="Barlow"/>
+                <a:ea typeface="Barlow"/>
+                <a:cs typeface="Barlow"/>
               </a:rPr>
               <a:t>Série Entenda o projeto · parte 1</a:t>
             </a:r>
@@ -4190,7 +4190,7 @@
         </p:nvSpPr>
         <p:spPr>
           <a:xfrm>
-            <a:off x="915442" y="4325479"/>
+            <a:off x="915442" y="4049378"/>
             <a:ext cx="7483629" cy="3689747"/>
           </a:xfrm>
           <a:prstGeom prst="rect">
@@ -4261,7 +4261,7 @@
         </p:nvSpPr>
         <p:spPr>
           <a:xfrm>
-            <a:off x="915442" y="8198921"/>
+            <a:off x="915442" y="8238937"/>
             <a:ext cx="5428214" cy="1560641"/>
           </a:xfrm>
           <a:prstGeom prst="rect">
@@ -4308,7 +4308,7 @@
         </p:nvSpPr>
         <p:spPr>
           <a:xfrm>
-            <a:off x="915442" y="10093648"/>
+            <a:off x="915442" y="10130682"/>
             <a:ext cx="4245426" cy="333299"/>
           </a:xfrm>
           <a:prstGeom prst="rect">
@@ -4355,7 +4355,7 @@
         </p:nvSpPr>
         <p:spPr>
           <a:xfrm>
-            <a:off x="915442" y="11515488"/>
+            <a:off x="915442" y="11496457"/>
             <a:ext cx="1210717" cy="437712"/>
           </a:xfrm>
           <a:prstGeom prst="rect">
@@ -4685,7 +4685,7 @@
         </p:nvSpPr>
         <p:spPr>
           <a:xfrm>
-            <a:off x="915442" y="1079840"/>
+            <a:off x="915442" y="1018941"/>
             <a:ext cx="1644714" cy="304495"/>
           </a:xfrm>
           <a:prstGeom prst="rect">
@@ -4711,13 +4711,13 @@
               </a:spcAft>
             </a:pPr>
             <a:r>
-              <a:rPr b="0" i="0" sz="2397" lang="pt-BR">
+              <a:rPr b="1" i="0" sz="2397" lang="pt-BR">
                 <a:solidFill>
                   <a:srgbClr val="B5121B"/>
                 </a:solidFill>
-                <a:latin typeface="Barlow SemiBold"/>
-                <a:ea typeface="Barlow SemiBold"/>
-                <a:cs typeface="Barlow SemiBold"/>
+                <a:latin typeface="Barlow"/>
+                <a:ea typeface="Barlow"/>
+                <a:cs typeface="Barlow"/>
               </a:rPr>
               <a:t>O conceito</a:t>
             </a:r>
@@ -4732,7 +4732,7 @@
         </p:nvSpPr>
         <p:spPr>
           <a:xfrm>
-            <a:off x="915442" y="3259010"/>
+            <a:off x="915442" y="3049443"/>
             <a:ext cx="8402702" cy="3734097"/>
           </a:xfrm>
           <a:prstGeom prst="rect">
@@ -4815,7 +4815,7 @@
         </p:nvSpPr>
         <p:spPr>
           <a:xfrm>
-            <a:off x="1353145" y="7622792"/>
+            <a:off x="1353145" y="7694822"/>
             <a:ext cx="7994309" cy="1656681"/>
           </a:xfrm>
           <a:prstGeom prst="rect">
@@ -4884,7 +4884,7 @@
         </p:nvSpPr>
         <p:spPr>
           <a:xfrm>
-            <a:off x="915442" y="11515488"/>
+            <a:off x="915442" y="11496457"/>
             <a:ext cx="4696450" cy="437712"/>
           </a:xfrm>
           <a:prstGeom prst="rect">
@@ -5157,7 +5157,7 @@
         </p:nvSpPr>
         <p:spPr>
           <a:xfrm>
-            <a:off x="915442" y="1079840"/>
+            <a:off x="915442" y="1018941"/>
             <a:ext cx="1481331" cy="304495"/>
           </a:xfrm>
           <a:prstGeom prst="rect">
@@ -5183,13 +5183,13 @@
               </a:spcAft>
             </a:pPr>
             <a:r>
-              <a:rPr b="0" i="0" sz="2397" lang="pt-BR">
+              <a:rPr b="1" i="0" sz="2397" lang="pt-BR">
                 <a:solidFill>
                   <a:srgbClr val="B5121B"/>
                 </a:solidFill>
-                <a:latin typeface="Barlow SemiBold"/>
-                <a:ea typeface="Barlow SemiBold"/>
-                <a:cs typeface="Barlow SemiBold"/>
+                <a:latin typeface="Barlow"/>
+                <a:ea typeface="Barlow"/>
+                <a:cs typeface="Barlow"/>
               </a:rPr>
               <a:t>O número</a:t>
             </a:r>
@@ -5204,7 +5204,7 @@
         </p:nvSpPr>
         <p:spPr>
           <a:xfrm>
-            <a:off x="915442" y="3167235"/>
+            <a:off x="915442" y="2166310"/>
             <a:ext cx="7100709" cy="2430818"/>
           </a:xfrm>
           <a:prstGeom prst="rect">
@@ -5251,7 +5251,7 @@
         </p:nvSpPr>
         <p:spPr>
           <a:xfrm>
-            <a:off x="915442" y="5556185"/>
+            <a:off x="915442" y="5396861"/>
             <a:ext cx="7632115" cy="1419442"/>
           </a:xfrm>
           <a:prstGeom prst="rect">
@@ -5310,7 +5310,7 @@
         </p:nvSpPr>
         <p:spPr>
           <a:xfrm>
-            <a:off x="915442" y="7238071"/>
+            <a:off x="915442" y="7310101"/>
             <a:ext cx="8475172" cy="2208908"/>
           </a:xfrm>
           <a:prstGeom prst="rect">
@@ -5357,7 +5357,7 @@
         </p:nvSpPr>
         <p:spPr>
           <a:xfrm>
-            <a:off x="915442" y="9844659"/>
+            <a:off x="915442" y="9881692"/>
             <a:ext cx="7231514" cy="333299"/>
           </a:xfrm>
           <a:prstGeom prst="rect">
@@ -5404,7 +5404,7 @@
         </p:nvSpPr>
         <p:spPr>
           <a:xfrm>
-            <a:off x="915442" y="11515339"/>
+            <a:off x="915442" y="11496308"/>
             <a:ext cx="5256996" cy="437712"/>
           </a:xfrm>
           <a:prstGeom prst="rect">
@@ -5863,7 +5863,7 @@
         </p:nvSpPr>
         <p:spPr>
           <a:xfrm>
-            <a:off x="915442" y="1079840"/>
+            <a:off x="915442" y="1018941"/>
             <a:ext cx="1175355" cy="304495"/>
           </a:xfrm>
           <a:prstGeom prst="rect">
@@ -5889,13 +5889,13 @@
               </a:spcAft>
             </a:pPr>
             <a:r>
-              <a:rPr b="0" i="0" sz="2397" lang="pt-BR">
+              <a:rPr b="1" i="0" sz="2397" lang="pt-BR">
                 <a:solidFill>
                   <a:srgbClr val="B5121B"/>
                 </a:solidFill>
-                <a:latin typeface="Barlow SemiBold"/>
-                <a:ea typeface="Barlow SemiBold"/>
-                <a:cs typeface="Barlow SemiBold"/>
+                <a:latin typeface="Barlow"/>
+                <a:ea typeface="Barlow"/>
+                <a:cs typeface="Barlow"/>
               </a:rPr>
               <a:t>O nome</a:t>
             </a:r>
@@ -5910,7 +5910,7 @@
         </p:nvSpPr>
         <p:spPr>
           <a:xfrm>
-            <a:off x="915442" y="2505046"/>
+            <a:off x="915442" y="2295479"/>
             <a:ext cx="7936453" cy="2800573"/>
           </a:xfrm>
           <a:prstGeom prst="rect">
@@ -5981,7 +5981,7 @@
         </p:nvSpPr>
         <p:spPr>
           <a:xfrm>
-            <a:off x="1488378" y="5752826"/>
+            <a:off x="1488378" y="5982226"/>
             <a:ext cx="195218" cy="686143"/>
           </a:xfrm>
           <a:prstGeom prst="rect">
@@ -6028,7 +6028,7 @@
         </p:nvSpPr>
         <p:spPr>
           <a:xfrm>
-            <a:off x="2175867" y="5927655"/>
+            <a:off x="2175867" y="5967671"/>
             <a:ext cx="6588621" cy="520214"/>
           </a:xfrm>
           <a:prstGeom prst="rect">
@@ -6075,7 +6075,7 @@
         </p:nvSpPr>
         <p:spPr>
           <a:xfrm>
-            <a:off x="1456283" y="7394698"/>
+            <a:off x="1456283" y="7624098"/>
             <a:ext cx="259556" cy="686143"/>
           </a:xfrm>
           <a:prstGeom prst="rect">
@@ -6122,7 +6122,7 @@
         </p:nvSpPr>
         <p:spPr>
           <a:xfrm>
-            <a:off x="2175867" y="7309524"/>
+            <a:off x="2175867" y="7349540"/>
             <a:ext cx="6717884" cy="1040427"/>
           </a:xfrm>
           <a:prstGeom prst="rect">
@@ -6169,7 +6169,7 @@
         </p:nvSpPr>
         <p:spPr>
           <a:xfrm>
-            <a:off x="1456618" y="9213675"/>
+            <a:off x="1456618" y="9443075"/>
             <a:ext cx="258738" cy="686143"/>
           </a:xfrm>
           <a:prstGeom prst="rect">
@@ -6216,7 +6216,7 @@
         </p:nvSpPr>
         <p:spPr>
           <a:xfrm>
-            <a:off x="2175867" y="9128501"/>
+            <a:off x="2175867" y="9168518"/>
             <a:ext cx="7529370" cy="1040427"/>
           </a:xfrm>
           <a:prstGeom prst="rect">
@@ -6263,7 +6263,7 @@
         </p:nvSpPr>
         <p:spPr>
           <a:xfrm>
-            <a:off x="915442" y="11515488"/>
+            <a:off x="915442" y="11496457"/>
             <a:ext cx="3018740" cy="437712"/>
           </a:xfrm>
           <a:prstGeom prst="rect">
@@ -6599,7 +6599,7 @@
         </p:nvSpPr>
         <p:spPr>
           <a:xfrm>
-            <a:off x="915442" y="1079840"/>
+            <a:off x="915442" y="1018941"/>
             <a:ext cx="3456012" cy="304495"/>
           </a:xfrm>
           <a:prstGeom prst="rect">
@@ -6625,13 +6625,13 @@
               </a:spcAft>
             </a:pPr>
             <a:r>
-              <a:rPr b="0" i="0" sz="2397" lang="pt-BR">
+              <a:rPr b="1" i="0" sz="2397" lang="pt-BR">
                 <a:solidFill>
                   <a:srgbClr val="B5121B"/>
                 </a:solidFill>
-                <a:latin typeface="Barlow SemiBold"/>
-                <a:ea typeface="Barlow SemiBold"/>
-                <a:cs typeface="Barlow SemiBold"/>
+                <a:latin typeface="Barlow"/>
+                <a:ea typeface="Barlow"/>
+                <a:cs typeface="Barlow"/>
               </a:rPr>
               <a:t>Nas próximas semanas</a:t>
             </a:r>
@@ -6646,7 +6646,7 @@
         </p:nvSpPr>
         <p:spPr>
           <a:xfrm>
-            <a:off x="915442" y="3027135"/>
+            <a:off x="915442" y="2817568"/>
             <a:ext cx="8559864" cy="1867049"/>
           </a:xfrm>
           <a:prstGeom prst="rect">
@@ -6705,7 +6705,7 @@
         </p:nvSpPr>
         <p:spPr>
           <a:xfrm>
-            <a:off x="915442" y="5515897"/>
+            <a:off x="915442" y="5428252"/>
             <a:ext cx="1750635" cy="438226"/>
           </a:xfrm>
           <a:prstGeom prst="rect">
@@ -6752,7 +6752,7 @@
         </p:nvSpPr>
         <p:spPr>
           <a:xfrm>
-            <a:off x="3008709" y="5464418"/>
+            <a:off x="3008709" y="5484426"/>
             <a:ext cx="6733734" cy="1000411"/>
           </a:xfrm>
           <a:prstGeom prst="rect">
@@ -6799,7 +6799,7 @@
         </p:nvSpPr>
         <p:spPr>
           <a:xfrm>
-            <a:off x="915442" y="7111335"/>
+            <a:off x="915442" y="7023689"/>
             <a:ext cx="1712491" cy="438226"/>
           </a:xfrm>
           <a:prstGeom prst="rect">
@@ -6846,7 +6846,7 @@
         </p:nvSpPr>
         <p:spPr>
           <a:xfrm>
-            <a:off x="3008709" y="7059856"/>
+            <a:off x="3008709" y="7079864"/>
             <a:ext cx="6342168" cy="1000411"/>
           </a:xfrm>
           <a:prstGeom prst="rect">
@@ -6893,7 +6893,7 @@
         </p:nvSpPr>
         <p:spPr>
           <a:xfrm>
-            <a:off x="915442" y="8706772"/>
+            <a:off x="915442" y="8619127"/>
             <a:ext cx="1711181" cy="438226"/>
           </a:xfrm>
           <a:prstGeom prst="rect">
@@ -6940,7 +6940,7 @@
         </p:nvSpPr>
         <p:spPr>
           <a:xfrm>
-            <a:off x="3008709" y="8655293"/>
+            <a:off x="3008709" y="8675301"/>
             <a:ext cx="6419335" cy="1000411"/>
           </a:xfrm>
           <a:prstGeom prst="rect">
@@ -6987,7 +6987,7 @@
         </p:nvSpPr>
         <p:spPr>
           <a:xfrm>
-            <a:off x="915442" y="11515488"/>
+            <a:off x="915442" y="11496457"/>
             <a:ext cx="1849517" cy="437712"/>
           </a:xfrm>
           <a:prstGeom prst="rect">
@@ -7115,7 +7115,7 @@
         </p:nvSpPr>
         <p:spPr>
           <a:xfrm>
-            <a:off x="3784751" y="4964105"/>
+            <a:off x="3784751" y="4903206"/>
             <a:ext cx="2717349" cy="304495"/>
           </a:xfrm>
           <a:prstGeom prst="rect">
@@ -7141,13 +7141,13 @@
               </a:spcAft>
             </a:pPr>
             <a:r>
-              <a:rPr b="0" i="0" sz="2397" lang="pt-BR">
+              <a:rPr b="1" i="0" sz="2397" lang="pt-BR">
                 <a:solidFill>
                   <a:srgbClr val="E9C46A"/>
                 </a:solidFill>
-                <a:latin typeface="Barlow SemiBold"/>
-                <a:ea typeface="Barlow SemiBold"/>
-                <a:cs typeface="Barlow SemiBold"/>
+                <a:latin typeface="Barlow"/>
+                <a:ea typeface="Barlow"/>
+                <a:cs typeface="Barlow"/>
               </a:rPr>
               <a:t>Na quarta, parte 2</a:t>
             </a:r>
@@ -7162,7 +7162,7 @@
         </p:nvSpPr>
         <p:spPr>
           <a:xfrm>
-            <a:off x="1002811" y="5732831"/>
+            <a:off x="1002811" y="5523264"/>
             <a:ext cx="8281228" cy="2800573"/>
           </a:xfrm>
           <a:prstGeom prst="rect">
@@ -7233,7 +7233,7 @@
         </p:nvSpPr>
         <p:spPr>
           <a:xfrm>
-            <a:off x="2531872" y="9137585"/>
+            <a:off x="2531872" y="9038830"/>
             <a:ext cx="5223108" cy="493776"/>
           </a:xfrm>
           <a:prstGeom prst="rect">
